--- a/data-eng/decks/w4d1s3.pptx
+++ b/data-eng/decks/w4d1s3.pptx
@@ -3099,7 +3099,7 @@
       <p:grpSpPr/>
       <p:sp>
         <p:nvSpPr>
-          <p:cNvPr id="2" name="Oval 1"/>
+          <p:cNvPr id="2" name="deckgen:decor"/>
           <p:cNvSpPr/>
           <p:nvPr/>
         </p:nvSpPr>
@@ -3129,7 +3129,7 @@
       </p:sp>
       <p:sp>
         <p:nvSpPr>
-          <p:cNvPr id="3" name="Oval 2"/>
+          <p:cNvPr id="3" name="deckgen:decor"/>
           <p:cNvSpPr/>
           <p:nvPr/>
         </p:nvSpPr>
@@ -3159,7 +3159,7 @@
       </p:sp>
       <p:sp>
         <p:nvSpPr>
-          <p:cNvPr id="4" name="Oval 3"/>
+          <p:cNvPr id="4" name="deckgen:decor"/>
           <p:cNvSpPr/>
           <p:nvPr/>
         </p:nvSpPr>
@@ -3189,7 +3189,7 @@
       </p:sp>
       <p:sp>
         <p:nvSpPr>
-          <p:cNvPr id="5" name="Rectangle 4"/>
+          <p:cNvPr id="5" name="deckgen:decor"/>
           <p:cNvSpPr/>
           <p:nvPr/>
         </p:nvSpPr>
@@ -3219,7 +3219,7 @@
       </p:sp>
       <p:sp>
         <p:nvSpPr>
-          <p:cNvPr id="6" name="Oval 5"/>
+          <p:cNvPr id="6" name="deckgen:decor"/>
           <p:cNvSpPr/>
           <p:nvPr/>
         </p:nvSpPr>
@@ -3249,7 +3249,7 @@
       </p:sp>
       <p:sp>
         <p:nvSpPr>
-          <p:cNvPr id="7" name="Oval 6"/>
+          <p:cNvPr id="7" name="deckgen:decor"/>
           <p:cNvSpPr/>
           <p:nvPr/>
         </p:nvSpPr>
@@ -3279,7 +3279,7 @@
       </p:sp>
       <p:sp>
         <p:nvSpPr>
-          <p:cNvPr id="8" name="Oval 7"/>
+          <p:cNvPr id="8" name="deckgen:decor"/>
           <p:cNvSpPr/>
           <p:nvPr/>
         </p:nvSpPr>
@@ -3309,7 +3309,7 @@
       </p:sp>
       <p:sp>
         <p:nvSpPr>
-          <p:cNvPr id="9" name="Oval 8"/>
+          <p:cNvPr id="9" name="deckgen:decor"/>
           <p:cNvSpPr/>
           <p:nvPr/>
         </p:nvSpPr>
@@ -3339,7 +3339,7 @@
       </p:sp>
       <p:sp>
         <p:nvSpPr>
-          <p:cNvPr id="10" name="Rectangle 9"/>
+          <p:cNvPr id="10" name="deckgen:decor"/>
           <p:cNvSpPr/>
           <p:nvPr/>
         </p:nvSpPr>
@@ -3599,7 +3599,7 @@
       <p:grpSpPr/>
       <p:sp>
         <p:nvSpPr>
-          <p:cNvPr id="2" name="Oval 1"/>
+          <p:cNvPr id="2" name="deckgen:decor"/>
           <p:cNvSpPr/>
           <p:nvPr/>
         </p:nvSpPr>
@@ -3629,7 +3629,7 @@
       </p:sp>
       <p:sp>
         <p:nvSpPr>
-          <p:cNvPr id="3" name="Oval 2"/>
+          <p:cNvPr id="3" name="deckgen:decor"/>
           <p:cNvSpPr/>
           <p:nvPr/>
         </p:nvSpPr>
@@ -4037,7 +4037,7 @@
                 <a:ea typeface="Pretendard"/>
                 <a:cs typeface="Pretendard"/>
               </a:rPr>
-              <a:t>4-2 준비 상태 점검 명령</a:t>
+              <a:t>4-2 준비 상태 · down → up 확인</a:t>
             </a:r>
           </a:p>
         </p:txBody>
@@ -4269,7 +4269,7 @@
                 <a:ea typeface="Pretendard"/>
                 <a:cs typeface="Pretendard"/>
               </a:rPr>
-              <a:t>4-2 Iceberg 예고</a:t>
+              <a:t>4-2 REST 카탈로그 · Spark 예고</a:t>
             </a:r>
           </a:p>
         </p:txBody>
@@ -4406,7 +4406,7 @@
       <p:grpSpPr/>
       <p:sp>
         <p:nvSpPr>
-          <p:cNvPr id="2" name="Oval 1"/>
+          <p:cNvPr id="2" name="deckgen:decor"/>
           <p:cNvSpPr/>
           <p:nvPr/>
         </p:nvSpPr>
@@ -4436,7 +4436,7 @@
       </p:sp>
       <p:sp>
         <p:nvSpPr>
-          <p:cNvPr id="3" name="Oval 2"/>
+          <p:cNvPr id="3" name="deckgen:decor"/>
           <p:cNvSpPr/>
           <p:nvPr/>
         </p:nvSpPr>
@@ -4466,7 +4466,7 @@
       </p:sp>
       <p:sp>
         <p:nvSpPr>
-          <p:cNvPr id="4" name="Oval 3"/>
+          <p:cNvPr id="4" name="deckgen:decor"/>
           <p:cNvSpPr/>
           <p:nvPr/>
         </p:nvSpPr>
@@ -4747,7 +4747,7 @@
                 <a:ea typeface="Pretendard"/>
                 <a:cs typeface="Pretendard"/>
               </a:rPr>
-              <a:t>mc alias set → mc mb → mc ls 로 raw·warehouse 버킷을 만든다</a:t>
+              <a:t>mc alias list local 확인 → mb 로 raw·warehouse 버킷을 만든다</a:t>
             </a:r>
           </a:p>
         </p:txBody>
@@ -5039,7 +5039,7 @@
                 <a:ea typeface="Pretendard"/>
                 <a:cs typeface="Pretendard"/>
               </a:rPr>
-              <a:t>dt=날짜 키로 올려 슬래시가 폴더가 아님을 --recursive 로 본다</a:t>
+              <a:t>raw/demo/dt=… 키로 올려 슬래시가 폴더가 아님을 본다</a:t>
             </a:r>
           </a:p>
         </p:txBody>
@@ -5260,7 +5260,7 @@
                 <a:ea typeface="Pretendard"/>
                 <a:cs typeface="Pretendard"/>
               </a:rPr>
-              <a:t>mc 컨테이너 안에서는 localhost 가 아니라 서비스 이름 minio 로 접근합니다</a:t>
+              <a:t>compose 의 MC_HOST_local 덕분에 local 이 이미 minio:9000 을 가리킵니다</a:t>
             </a:r>
           </a:p>
         </p:txBody>
@@ -5397,7 +5397,7 @@
       <p:grpSpPr/>
       <p:sp>
         <p:nvSpPr>
-          <p:cNvPr id="2" name="Oval 1"/>
+          <p:cNvPr id="2" name="deckgen:decor"/>
           <p:cNvSpPr/>
           <p:nvPr/>
         </p:nvSpPr>
@@ -5427,7 +5427,7 @@
       </p:sp>
       <p:sp>
         <p:nvSpPr>
-          <p:cNvPr id="3" name="Oval 2"/>
+          <p:cNvPr id="3" name="deckgen:decor"/>
           <p:cNvSpPr/>
           <p:nvPr/>
         </p:nvSpPr>
@@ -5457,7 +5457,7 @@
       </p:sp>
       <p:sp>
         <p:nvSpPr>
-          <p:cNvPr id="4" name="Oval 3"/>
+          <p:cNvPr id="4" name="deckgen:decor"/>
           <p:cNvSpPr/>
           <p:nvPr/>
         </p:nvSpPr>
@@ -5633,7 +5633,7 @@
                 <a:ea typeface="Pretendard"/>
                 <a:cs typeface="Pretendard"/>
               </a:rPr>
-              <a:t>호스트의 ./data 폴더가 mc 컨테이너의 /data 에 마운트되어 있습니다 — 파일은 data/ 에 만듭니다</a:t>
+              <a:t>연습 키는 raw/demo/ 아래에 — raw/orders/ 는 4-3 의 Spark 가 통째로 읽는 랜딩 존입니다</a:t>
             </a:r>
           </a:p>
         </p:txBody>
@@ -5738,7 +5738,7 @@
                 <a:ea typeface="Pretendard"/>
                 <a:cs typeface="Pretendard"/>
               </a:rPr>
-              <a:t>1. 등록·버킷</a:t>
+              <a:t>1. 확인·버킷</a:t>
             </a:r>
           </a:p>
         </p:txBody>
@@ -5779,7 +5779,7 @@
                 <a:ea typeface="Pretendard"/>
                 <a:cs typeface="Pretendard"/>
               </a:rPr>
-              <a:t>alias set</a:t>
+              <a:t>alias list</a:t>
             </a:r>
           </a:p>
           <a:p>
@@ -6107,7 +6107,7 @@
                 <a:ea typeface="Pretendard"/>
                 <a:cs typeface="Pretendard"/>
               </a:rPr>
-              <a:t>dt=2026-08-01</a:t>
+              <a:t>raw/demo/dt=…</a:t>
             </a:r>
           </a:p>
           <a:p>
@@ -6453,7 +6453,7 @@
                 <a:ea typeface="Pretendard"/>
                 <a:cs typeface="Pretendard"/>
               </a:rPr>
-              <a:t>mirror · rm · du</a:t>
+              <a:t>mirror · rm · 집계</a:t>
             </a:r>
           </a:p>
         </p:txBody>
@@ -6590,7 +6590,7 @@
       <p:grpSpPr/>
       <p:sp>
         <p:nvSpPr>
-          <p:cNvPr id="2" name="Oval 1"/>
+          <p:cNvPr id="2" name="deckgen:decor"/>
           <p:cNvSpPr/>
           <p:nvPr/>
         </p:nvSpPr>
@@ -6620,7 +6620,7 @@
       </p:sp>
       <p:sp>
         <p:nvSpPr>
-          <p:cNvPr id="3" name="Oval 2"/>
+          <p:cNvPr id="3" name="deckgen:decor"/>
           <p:cNvSpPr/>
           <p:nvPr/>
         </p:nvSpPr>
@@ -6650,7 +6650,7 @@
       </p:sp>
       <p:sp>
         <p:nvSpPr>
-          <p:cNvPr id="4" name="Oval 3"/>
+          <p:cNvPr id="4" name="deckgen:decor"/>
           <p:cNvSpPr/>
           <p:nvPr/>
         </p:nvSpPr>
@@ -6755,7 +6755,7 @@
                 <a:ea typeface="Pretendard"/>
                 <a:cs typeface="Pretendard"/>
               </a:rPr>
-              <a:t>핵심 명령 — 등록 · 버킷 · 올리기 · 읽기</a:t>
+              <a:t>핵심 명령 — 확인 · 버킷 · 올리기 · 읽기</a:t>
             </a:r>
           </a:p>
         </p:txBody>
@@ -6856,7 +6856,7 @@
                 <a:ea typeface="Pretendard"/>
                 <a:cs typeface="Pretendard"/>
               </a:rPr>
-              <a:t>서버 등록</a:t>
+              <a:t>별칭 확인</a:t>
             </a:r>
           </a:p>
         </p:txBody>
@@ -6929,7 +6929,7 @@
                 <a:ea typeface="Pretendard"/>
                 <a:cs typeface="Pretendard"/>
               </a:rPr>
-              <a:t>mc alias set local http://minio:9000 minioadmin minioadmin</a:t>
+              <a:t>mc alias list local → http://minio:9000 · Src env</a:t>
             </a:r>
           </a:p>
         </p:txBody>
@@ -7217,7 +7217,7 @@
                 <a:ea typeface="Pretendard"/>
                 <a:cs typeface="Pretendard"/>
               </a:rPr>
-              <a:t>mc ls local</a:t>
+              <a:t>mc ls local → raw/ · warehouse/</a:t>
             </a:r>
           </a:p>
         </p:txBody>
@@ -7361,7 +7361,7 @@
                 <a:ea typeface="Pretendard"/>
                 <a:cs typeface="Pretendard"/>
               </a:rPr>
-              <a:t>mc cp /data/hello.txt local/raw/hello.txt</a:t>
+              <a:t>mc cp /data/hello.txt local/raw/hello.txt → 21 B</a:t>
             </a:r>
           </a:p>
         </p:txBody>
@@ -7505,7 +7505,7 @@
                 <a:ea typeface="Pretendard"/>
                 <a:cs typeface="Pretendard"/>
               </a:rPr>
-              <a:t>mc cat local/raw/hello.txt</a:t>
+              <a:t>mc cat local/raw/hello.txt → hello object storage</a:t>
             </a:r>
           </a:p>
         </p:txBody>
@@ -7546,7 +7546,7 @@
                 <a:ea typeface="Pretendard"/>
                 <a:cs typeface="Pretendard"/>
               </a:rPr>
-              <a:t>모든 mc 명령 앞에 docker compose exec mc 가 붙는다 — mb 확인: Bucket created successfully</a:t>
+              <a:t>모든 mc 명령 앞에 docker compose exec mc — 새 터미널이면 cd ~/lakehouse 부터, 파일은 호스트 data/ 에</a:t>
             </a:r>
           </a:p>
         </p:txBody>
@@ -7683,7 +7683,7 @@
       <p:grpSpPr/>
       <p:sp>
         <p:nvSpPr>
-          <p:cNvPr id="2" name="Oval 1"/>
+          <p:cNvPr id="2" name="deckgen:decor"/>
           <p:cNvSpPr/>
           <p:nvPr/>
         </p:nvSpPr>
@@ -7713,7 +7713,7 @@
       </p:sp>
       <p:sp>
         <p:nvSpPr>
-          <p:cNvPr id="3" name="Oval 2"/>
+          <p:cNvPr id="3" name="deckgen:decor"/>
           <p:cNvSpPr/>
           <p:nvPr/>
         </p:nvSpPr>
@@ -7743,7 +7743,7 @@
       </p:sp>
       <p:sp>
         <p:nvSpPr>
-          <p:cNvPr id="4" name="Oval 3"/>
+          <p:cNvPr id="4" name="deckgen:decor"/>
           <p:cNvSpPr/>
           <p:nvPr/>
         </p:nvSpPr>
@@ -8065,7 +8065,7 @@
                 <a:ea typeface="Pretendard"/>
                 <a:cs typeface="Pretendard"/>
               </a:rPr>
-              <a:t>raw/</a:t>
+              <a:t>raw</a:t>
             </a:r>
           </a:p>
         </p:txBody>
@@ -8241,7 +8241,7 @@
                 <a:ea typeface="Pretendard"/>
                 <a:cs typeface="Pretendard"/>
               </a:rPr>
-              <a:t>orders/ dt=…/</a:t>
+              <a:t>demo / dt=…</a:t>
             </a:r>
           </a:p>
         </p:txBody>
@@ -8679,7 +8679,7 @@
                 <a:ea typeface="Pretendard"/>
                 <a:cs typeface="Pretendard"/>
               </a:rPr>
-              <a:t>orders/dt=2026-08-01/part-0.csv</a:t>
+              <a:t>demo/dt=2026-08-01/part-0.csv</a:t>
             </a:r>
           </a:p>
         </p:txBody>
@@ -8750,7 +8750,7 @@
                 <a:ea typeface="Pretendard"/>
                 <a:cs typeface="Pretendard"/>
               </a:rPr>
-              <a:t>orders/dt=2026-08-02/part-0.csv</a:t>
+              <a:t>demo/dt=2026-08-02/part-0.csv</a:t>
             </a:r>
           </a:p>
         </p:txBody>
@@ -9029,7 +9029,7 @@
       <p:grpSpPr/>
       <p:sp>
         <p:nvSpPr>
-          <p:cNvPr id="2" name="Oval 1"/>
+          <p:cNvPr id="2" name="deckgen:decor"/>
           <p:cNvSpPr/>
           <p:nvPr/>
         </p:nvSpPr>
@@ -9059,7 +9059,7 @@
       </p:sp>
       <p:sp>
         <p:nvSpPr>
-          <p:cNvPr id="3" name="Oval 2"/>
+          <p:cNvPr id="3" name="deckgen:decor"/>
           <p:cNvSpPr/>
           <p:nvPr/>
         </p:nvSpPr>
@@ -9089,7 +9089,7 @@
       </p:sp>
       <p:sp>
         <p:nvSpPr>
-          <p:cNvPr id="4" name="Oval 3"/>
+          <p:cNvPr id="4" name="deckgen:decor"/>
           <p:cNvSpPr/>
           <p:nvPr/>
         </p:nvSpPr>
@@ -9194,7 +9194,7 @@
                 <a:ea typeface="Pretendard"/>
                 <a:cs typeface="Pretendard"/>
               </a:rPr>
-              <a:t>빈 폴더 만들기 — 실패해야 정상</a:t>
+              <a:t>없는 경로를 조회하면 — 둘이 다르다</a:t>
             </a:r>
           </a:p>
         </p:txBody>
@@ -9237,8 +9237,8 @@
         </p:nvSpPr>
         <p:spPr>
           <a:xfrm>
-            <a:off x="1143000" y="3067050"/>
-            <a:ext cx="16002000" cy="438150"/>
+            <a:off x="1143000" y="2857500"/>
+            <a:ext cx="7372350" cy="533400"/>
           </a:xfrm>
           <a:prstGeom prst="rect">
             <a:avLst/>
@@ -9253,11 +9253,52 @@
           <a:p>
             <a:pPr algn="l">
               <a:lnSpc>
-                <a:spcPct val="130000"/>
-              </a:lnSpc>
-            </a:pPr>
-            <a:r>
-              <a:rPr sz="2550" b="1">
+                <a:spcPct val="110000"/>
+              </a:lnSpc>
+            </a:pPr>
+            <a:r>
+              <a:rPr sz="3150" b="1">
+                <a:solidFill>
+                  <a:srgbClr val="0D2B5E"/>
+                </a:solidFill>
+                <a:latin typeface="Pretendard"/>
+                <a:ea typeface="Pretendard"/>
+                <a:cs typeface="Pretendard"/>
+              </a:rPr>
+              <a:t>없는 접두사 — 출력 없이 끝</a:t>
+            </a:r>
+          </a:p>
+        </p:txBody>
+      </p:sp>
+      <p:sp>
+        <p:nvSpPr>
+          <p:cNvPr id="9" name="TextBox 8"/>
+          <p:cNvSpPr txBox="1"/>
+          <p:nvPr/>
+        </p:nvSpPr>
+        <p:spPr>
+          <a:xfrm>
+            <a:off x="1143000" y="3467100"/>
+            <a:ext cx="7372350" cy="876300"/>
+          </a:xfrm>
+          <a:prstGeom prst="rect">
+            <a:avLst/>
+          </a:prstGeom>
+          <a:noFill/>
+        </p:spPr>
+        <p:txBody>
+          <a:bodyPr wrap="square" lIns="0" rIns="0" tIns="0" bIns="0" anchor="t">
+            <a:spAutoFit/>
+          </a:bodyPr>
+          <a:lstStyle/>
+          <a:p>
+            <a:pPr algn="l">
+              <a:lnSpc>
+                <a:spcPct val="146000"/>
+              </a:lnSpc>
+            </a:pPr>
+            <a:r>
+              <a:rPr sz="2250" b="0">
                 <a:solidFill>
                   <a:srgbClr val="3D3D3D"/>
                 </a:solidFill>
@@ -9265,25 +9306,25 @@
                 <a:ea typeface="Pretendard"/>
                 <a:cs typeface="Pretendard"/>
               </a:rPr>
-              <a:t>이론의 「빈 폴더를 만들 수 없다」를 직접 봅니다 — 오브젝트가 있어야 경로가 존재합니다</a:t>
-            </a:r>
-          </a:p>
-        </p:txBody>
-      </p:sp>
-      <p:sp>
-        <p:nvSpPr>
-          <p:cNvPr id="9" name="Rounded Rectangle 8"/>
-          <p:cNvSpPr/>
-          <p:nvPr/>
-        </p:nvSpPr>
-        <p:spPr>
-          <a:xfrm>
-            <a:off x="1143000" y="3924300"/>
-            <a:ext cx="5080000" cy="3143250"/>
+              <a:t>그 접두사로 시작하는 키가 0개일 뿐</a:t>
+            </a:r>
+          </a:p>
+        </p:txBody>
+      </p:sp>
+      <p:sp>
+        <p:nvSpPr>
+          <p:cNvPr id="10" name="Rounded Rectangle 9"/>
+          <p:cNvSpPr/>
+          <p:nvPr/>
+        </p:nvSpPr>
+        <p:spPr>
+          <a:xfrm>
+            <a:off x="1143000" y="4610100"/>
+            <a:ext cx="7372350" cy="2857500"/>
           </a:xfrm>
           <a:prstGeom prst="roundRect">
             <a:avLst>
-              <a:gd name="adj" fmla="val 1515"/>
+              <a:gd name="adj" fmla="val 1666"/>
             </a:avLst>
           </a:prstGeom>
           <a:solidFill>
@@ -9306,20 +9347,20 @@
       </p:sp>
       <p:sp>
         <p:nvSpPr>
-          <p:cNvPr id="10" name="Rectangle 9"/>
-          <p:cNvSpPr/>
-          <p:nvPr/>
-        </p:nvSpPr>
-        <p:spPr>
-          <a:xfrm>
-            <a:off x="1143000" y="3924300"/>
-            <a:ext cx="5080000" cy="914400"/>
-          </a:xfrm>
-          <a:prstGeom prst="rect">
-            <a:avLst/>
-          </a:prstGeom>
-          <a:solidFill>
-            <a:srgbClr val="0D2B5E"/>
+          <p:cNvPr id="11" name="Oval 10"/>
+          <p:cNvSpPr/>
+          <p:nvPr/>
+        </p:nvSpPr>
+        <p:spPr>
+          <a:xfrm>
+            <a:off x="1447800" y="5016817"/>
+            <a:ext cx="97155" cy="97155"/>
+          </a:xfrm>
+          <a:prstGeom prst="ellipse">
+            <a:avLst/>
+          </a:prstGeom>
+          <a:solidFill>
+            <a:srgbClr val="1E5BC6"/>
           </a:solidFill>
           <a:ln>
             <a:noFill/>
@@ -9336,14 +9377,197 @@
       </p:sp>
       <p:sp>
         <p:nvSpPr>
-          <p:cNvPr id="11" name="TextBox 10"/>
-          <p:cNvSpPr txBox="1"/>
-          <p:nvPr/>
-        </p:nvSpPr>
-        <p:spPr>
-          <a:xfrm>
-            <a:off x="1143000" y="4171950"/>
-            <a:ext cx="5080000" cy="419100"/>
+          <p:cNvPr id="12" name="TextBox 11"/>
+          <p:cNvSpPr txBox="1"/>
+          <p:nvPr/>
+        </p:nvSpPr>
+        <p:spPr>
+          <a:xfrm>
+            <a:off x="1633538" y="4838700"/>
+            <a:ext cx="6634162" cy="453390"/>
+          </a:xfrm>
+          <a:prstGeom prst="rect">
+            <a:avLst/>
+          </a:prstGeom>
+          <a:noFill/>
+        </p:spPr>
+        <p:txBody>
+          <a:bodyPr wrap="square" lIns="0" rIns="0" tIns="0" bIns="0" anchor="ctr">
+            <a:spAutoFit/>
+          </a:bodyPr>
+          <a:lstStyle/>
+          <a:p>
+            <a:pPr algn="l">
+              <a:lnSpc>
+                <a:spcPct val="120000"/>
+              </a:lnSpc>
+            </a:pPr>
+            <a:r>
+              <a:rPr sz="1575" b="0">
+                <a:solidFill>
+                  <a:srgbClr val="3D3D3D"/>
+                </a:solidFill>
+                <a:latin typeface="Pretendard"/>
+                <a:ea typeface="Pretendard"/>
+                <a:cs typeface="Pretendard"/>
+              </a:rPr>
+              <a:t>mc ls local/raw/empty-folder/</a:t>
+            </a:r>
+          </a:p>
+        </p:txBody>
+      </p:sp>
+      <p:sp>
+        <p:nvSpPr>
+          <p:cNvPr id="13" name="Oval 12"/>
+          <p:cNvSpPr/>
+          <p:nvPr/>
+        </p:nvSpPr>
+        <p:spPr>
+          <a:xfrm>
+            <a:off x="1447800" y="5527358"/>
+            <a:ext cx="97155" cy="97155"/>
+          </a:xfrm>
+          <a:prstGeom prst="ellipse">
+            <a:avLst/>
+          </a:prstGeom>
+          <a:solidFill>
+            <a:srgbClr val="1E5BC6"/>
+          </a:solidFill>
+          <a:ln>
+            <a:noFill/>
+          </a:ln>
+          <a:effectLst/>
+        </p:spPr>
+        <p:txBody>
+          <a:bodyPr rtlCol="0" anchor="ctr" wrap="square"/>
+          <a:lstStyle/>
+          <a:p>
+            <a:pPr algn="ctr"/>
+          </a:p>
+        </p:txBody>
+      </p:sp>
+      <p:sp>
+        <p:nvSpPr>
+          <p:cNvPr id="14" name="TextBox 13"/>
+          <p:cNvSpPr txBox="1"/>
+          <p:nvPr/>
+        </p:nvSpPr>
+        <p:spPr>
+          <a:xfrm>
+            <a:off x="1633538" y="5349240"/>
+            <a:ext cx="6634162" cy="453390"/>
+          </a:xfrm>
+          <a:prstGeom prst="rect">
+            <a:avLst/>
+          </a:prstGeom>
+          <a:noFill/>
+        </p:spPr>
+        <p:txBody>
+          <a:bodyPr wrap="square" lIns="0" rIns="0" tIns="0" bIns="0" anchor="ctr">
+            <a:spAutoFit/>
+          </a:bodyPr>
+          <a:lstStyle/>
+          <a:p>
+            <a:pPr algn="l">
+              <a:lnSpc>
+                <a:spcPct val="120000"/>
+              </a:lnSpc>
+            </a:pPr>
+            <a:r>
+              <a:rPr sz="1575" b="0">
+                <a:solidFill>
+                  <a:srgbClr val="3D3D3D"/>
+                </a:solidFill>
+                <a:latin typeface="Pretendard"/>
+                <a:ea typeface="Pretendard"/>
+                <a:cs typeface="Pretendard"/>
+              </a:rPr>
+              <a:t>아무 줄도 없이 「종료 코드: 0」</a:t>
+            </a:r>
+          </a:p>
+        </p:txBody>
+      </p:sp>
+      <p:sp>
+        <p:nvSpPr>
+          <p:cNvPr id="15" name="Oval 14"/>
+          <p:cNvSpPr/>
+          <p:nvPr/>
+        </p:nvSpPr>
+        <p:spPr>
+          <a:xfrm>
+            <a:off x="1447800" y="6037898"/>
+            <a:ext cx="97155" cy="97155"/>
+          </a:xfrm>
+          <a:prstGeom prst="ellipse">
+            <a:avLst/>
+          </a:prstGeom>
+          <a:solidFill>
+            <a:srgbClr val="1E5BC6"/>
+          </a:solidFill>
+          <a:ln>
+            <a:noFill/>
+          </a:ln>
+          <a:effectLst/>
+        </p:spPr>
+        <p:txBody>
+          <a:bodyPr rtlCol="0" anchor="ctr" wrap="square"/>
+          <a:lstStyle/>
+          <a:p>
+            <a:pPr algn="ctr"/>
+          </a:p>
+        </p:txBody>
+      </p:sp>
+      <p:sp>
+        <p:nvSpPr>
+          <p:cNvPr id="16" name="TextBox 15"/>
+          <p:cNvSpPr txBox="1"/>
+          <p:nvPr/>
+        </p:nvSpPr>
+        <p:spPr>
+          <a:xfrm>
+            <a:off x="1633538" y="5859780"/>
+            <a:ext cx="6634162" cy="453390"/>
+          </a:xfrm>
+          <a:prstGeom prst="rect">
+            <a:avLst/>
+          </a:prstGeom>
+          <a:noFill/>
+        </p:spPr>
+        <p:txBody>
+          <a:bodyPr wrap="square" lIns="0" rIns="0" tIns="0" bIns="0" anchor="ctr">
+            <a:spAutoFit/>
+          </a:bodyPr>
+          <a:lstStyle/>
+          <a:p>
+            <a:pPr algn="l">
+              <a:lnSpc>
+                <a:spcPct val="120000"/>
+              </a:lnSpc>
+            </a:pPr>
+            <a:r>
+              <a:rPr sz="1575" b="0">
+                <a:solidFill>
+                  <a:srgbClr val="3D3D3D"/>
+                </a:solidFill>
+                <a:latin typeface="Pretendard"/>
+                <a:ea typeface="Pretendard"/>
+                <a:cs typeface="Pretendard"/>
+              </a:rPr>
+              <a:t>빈 폴더는 없다 — 오류가 아니다</a:t>
+            </a:r>
+          </a:p>
+        </p:txBody>
+      </p:sp>
+      <p:sp>
+        <p:nvSpPr>
+          <p:cNvPr id="17" name="TextBox 16"/>
+          <p:cNvSpPr txBox="1"/>
+          <p:nvPr/>
+        </p:nvSpPr>
+        <p:spPr>
+          <a:xfrm>
+            <a:off x="9772650" y="2857500"/>
+            <a:ext cx="7372350" cy="533400"/>
           </a:xfrm>
           <a:prstGeom prst="rect">
             <a:avLst/>
@@ -9356,35 +9580,35 @@
           </a:bodyPr>
           <a:lstStyle/>
           <a:p>
-            <a:pPr algn="ctr">
-              <a:lnSpc>
-                <a:spcPct val="100000"/>
-              </a:lnSpc>
-            </a:pPr>
-            <a:r>
-              <a:rPr sz="2475" b="1">
-                <a:solidFill>
-                  <a:srgbClr val="FFFFFF"/>
-                </a:solidFill>
-                <a:latin typeface="Pretendard"/>
-                <a:ea typeface="Pretendard"/>
-                <a:cs typeface="Pretendard"/>
-              </a:rPr>
-              <a:t>① 없는 접두사 조회</a:t>
-            </a:r>
-          </a:p>
-        </p:txBody>
-      </p:sp>
-      <p:sp>
-        <p:nvSpPr>
-          <p:cNvPr id="12" name="TextBox 11"/>
-          <p:cNvSpPr txBox="1"/>
-          <p:nvPr/>
-        </p:nvSpPr>
-        <p:spPr>
-          <a:xfrm>
-            <a:off x="1352550" y="5143500"/>
-            <a:ext cx="4660900" cy="1524000"/>
+            <a:pPr algn="l">
+              <a:lnSpc>
+                <a:spcPct val="110000"/>
+              </a:lnSpc>
+            </a:pPr>
+            <a:r>
+              <a:rPr sz="3150" b="1">
+                <a:solidFill>
+                  <a:srgbClr val="0D2B5E"/>
+                </a:solidFill>
+                <a:latin typeface="Pretendard"/>
+                <a:ea typeface="Pretendard"/>
+                <a:cs typeface="Pretendard"/>
+              </a:rPr>
+              <a:t>없는 버킷 — 오류</a:t>
+            </a:r>
+          </a:p>
+        </p:txBody>
+      </p:sp>
+      <p:sp>
+        <p:nvSpPr>
+          <p:cNvPr id="18" name="TextBox 17"/>
+          <p:cNvSpPr txBox="1"/>
+          <p:nvPr/>
+        </p:nvSpPr>
+        <p:spPr>
+          <a:xfrm>
+            <a:off x="9772650" y="3467100"/>
+            <a:ext cx="7372350" cy="876300"/>
           </a:xfrm>
           <a:prstGeom prst="rect">
             <a:avLst/>
@@ -9397,13 +9621,13 @@
           </a:bodyPr>
           <a:lstStyle/>
           <a:p>
-            <a:pPr algn="ctr">
+            <a:pPr algn="l">
               <a:lnSpc>
                 <a:spcPct val="146000"/>
               </a:lnSpc>
             </a:pPr>
             <a:r>
-              <a:rPr sz="2100" b="0">
+              <a:rPr sz="2250" b="0">
                 <a:solidFill>
                   <a:srgbClr val="3D3D3D"/>
                 </a:solidFill>
@@ -9411,43 +9635,25 @@
                 <a:ea typeface="Pretendard"/>
                 <a:cs typeface="Pretendard"/>
               </a:rPr>
-              <a:t>mc ls local/raw/</a:t>
-            </a:r>
-          </a:p>
-          <a:p>
-            <a:pPr algn="ctr">
-              <a:lnSpc>
-                <a:spcPct val="146000"/>
-              </a:lnSpc>
-            </a:pPr>
-            <a:r>
-              <a:rPr sz="2100" b="0">
-                <a:solidFill>
-                  <a:srgbClr val="3D3D3D"/>
-                </a:solidFill>
-                <a:latin typeface="Pretendard"/>
-                <a:ea typeface="Pretendard"/>
-                <a:cs typeface="Pretendard"/>
-              </a:rPr>
-              <a:t>empty-folder/</a:t>
-            </a:r>
-          </a:p>
-        </p:txBody>
-      </p:sp>
-      <p:sp>
-        <p:nvSpPr>
-          <p:cNvPr id="13" name="Rounded Rectangle 12"/>
-          <p:cNvSpPr/>
-          <p:nvPr/>
-        </p:nvSpPr>
-        <p:spPr>
-          <a:xfrm>
-            <a:off x="6604000" y="3924300"/>
-            <a:ext cx="5080000" cy="3143250"/>
+              <a:t>버킷은 실제로 있는 그릇이다</a:t>
+            </a:r>
+          </a:p>
+        </p:txBody>
+      </p:sp>
+      <p:sp>
+        <p:nvSpPr>
+          <p:cNvPr id="19" name="Rounded Rectangle 18"/>
+          <p:cNvSpPr/>
+          <p:nvPr/>
+        </p:nvSpPr>
+        <p:spPr>
+          <a:xfrm>
+            <a:off x="9772650" y="4610100"/>
+            <a:ext cx="7372350" cy="2857500"/>
           </a:xfrm>
           <a:prstGeom prst="roundRect">
             <a:avLst>
-              <a:gd name="adj" fmla="val 1515"/>
+              <a:gd name="adj" fmla="val 1666"/>
             </a:avLst>
           </a:prstGeom>
           <a:solidFill>
@@ -9470,16 +9676,16 @@
       </p:sp>
       <p:sp>
         <p:nvSpPr>
-          <p:cNvPr id="14" name="Rectangle 13"/>
-          <p:cNvSpPr/>
-          <p:nvPr/>
-        </p:nvSpPr>
-        <p:spPr>
-          <a:xfrm>
-            <a:off x="6604000" y="3924300"/>
-            <a:ext cx="5080000" cy="914400"/>
-          </a:xfrm>
-          <a:prstGeom prst="rect">
+          <p:cNvPr id="20" name="Oval 19"/>
+          <p:cNvSpPr/>
+          <p:nvPr/>
+        </p:nvSpPr>
+        <p:spPr>
+          <a:xfrm>
+            <a:off x="10077450" y="5016817"/>
+            <a:ext cx="97155" cy="97155"/>
+          </a:xfrm>
+          <a:prstGeom prst="ellipse">
             <a:avLst/>
           </a:prstGeom>
           <a:solidFill>
@@ -9500,74 +9706,33 @@
       </p:sp>
       <p:sp>
         <p:nvSpPr>
-          <p:cNvPr id="15" name="TextBox 14"/>
-          <p:cNvSpPr txBox="1"/>
-          <p:nvPr/>
-        </p:nvSpPr>
-        <p:spPr>
-          <a:xfrm>
-            <a:off x="6604000" y="4171950"/>
-            <a:ext cx="5080000" cy="419100"/>
-          </a:xfrm>
-          <a:prstGeom prst="rect">
-            <a:avLst/>
-          </a:prstGeom>
-          <a:noFill/>
-        </p:spPr>
-        <p:txBody>
-          <a:bodyPr wrap="square" lIns="0" rIns="0" tIns="0" bIns="0" anchor="t">
-            <a:spAutoFit/>
-          </a:bodyPr>
-          <a:lstStyle/>
-          <a:p>
-            <a:pPr algn="ctr">
-              <a:lnSpc>
-                <a:spcPct val="100000"/>
-              </a:lnSpc>
-            </a:pPr>
-            <a:r>
-              <a:rPr sz="2475" b="1">
-                <a:solidFill>
-                  <a:srgbClr val="FFFFFF"/>
-                </a:solidFill>
-                <a:latin typeface="Pretendard"/>
-                <a:ea typeface="Pretendard"/>
-                <a:cs typeface="Pretendard"/>
-              </a:rPr>
-              <a:t>② 실패 = 정상</a:t>
-            </a:r>
-          </a:p>
-        </p:txBody>
-      </p:sp>
-      <p:sp>
-        <p:nvSpPr>
-          <p:cNvPr id="16" name="TextBox 15"/>
-          <p:cNvSpPr txBox="1"/>
-          <p:nvPr/>
-        </p:nvSpPr>
-        <p:spPr>
-          <a:xfrm>
-            <a:off x="6813550" y="5143500"/>
-            <a:ext cx="4660900" cy="1524000"/>
-          </a:xfrm>
-          <a:prstGeom prst="rect">
-            <a:avLst/>
-          </a:prstGeom>
-          <a:noFill/>
-        </p:spPr>
-        <p:txBody>
-          <a:bodyPr wrap="square" lIns="0" rIns="0" tIns="0" bIns="0" anchor="t">
-            <a:spAutoFit/>
-          </a:bodyPr>
-          <a:lstStyle/>
-          <a:p>
-            <a:pPr algn="ctr">
-              <a:lnSpc>
-                <a:spcPct val="146000"/>
-              </a:lnSpc>
-            </a:pPr>
-            <a:r>
-              <a:rPr sz="2100" b="0">
+          <p:cNvPr id="21" name="TextBox 20"/>
+          <p:cNvSpPr txBox="1"/>
+          <p:nvPr/>
+        </p:nvSpPr>
+        <p:spPr>
+          <a:xfrm>
+            <a:off x="10263188" y="4838700"/>
+            <a:ext cx="6634162" cy="453390"/>
+          </a:xfrm>
+          <a:prstGeom prst="rect">
+            <a:avLst/>
+          </a:prstGeom>
+          <a:noFill/>
+        </p:spPr>
+        <p:txBody>
+          <a:bodyPr wrap="square" lIns="0" rIns="0" tIns="0" bIns="0" anchor="ctr">
+            <a:spAutoFit/>
+          </a:bodyPr>
+          <a:lstStyle/>
+          <a:p>
+            <a:pPr algn="l">
+              <a:lnSpc>
+                <a:spcPct val="120000"/>
+              </a:lnSpc>
+            </a:pPr>
+            <a:r>
+              <a:rPr sz="1575" b="0">
                 <a:solidFill>
                   <a:srgbClr val="3D3D3D"/>
                 </a:solidFill>
@@ -9575,79 +9740,27 @@
                 <a:ea typeface="Pretendard"/>
                 <a:cs typeface="Pretendard"/>
               </a:rPr>
-              <a:t>오브젝트가 없으면</a:t>
-            </a:r>
-          </a:p>
-          <a:p>
-            <a:pPr algn="ctr">
-              <a:lnSpc>
-                <a:spcPct val="146000"/>
-              </a:lnSpc>
-            </a:pPr>
-            <a:r>
-              <a:rPr sz="2100" b="0">
-                <a:solidFill>
-                  <a:srgbClr val="3D3D3D"/>
-                </a:solidFill>
-                <a:latin typeface="Pretendard"/>
-                <a:ea typeface="Pretendard"/>
-                <a:cs typeface="Pretendard"/>
-              </a:rPr>
-              <a:t>경로도 없다</a:t>
-            </a:r>
-          </a:p>
-        </p:txBody>
-      </p:sp>
-      <p:sp>
-        <p:nvSpPr>
-          <p:cNvPr id="17" name="Rounded Rectangle 16"/>
-          <p:cNvSpPr/>
-          <p:nvPr/>
-        </p:nvSpPr>
-        <p:spPr>
-          <a:xfrm>
-            <a:off x="12065000" y="3924300"/>
-            <a:ext cx="5080000" cy="3143250"/>
-          </a:xfrm>
-          <a:prstGeom prst="roundRect">
-            <a:avLst>
-              <a:gd name="adj" fmla="val 1515"/>
-            </a:avLst>
-          </a:prstGeom>
-          <a:solidFill>
-            <a:srgbClr val="FAFBFD"/>
-          </a:solidFill>
-          <a:ln w="9525">
-            <a:solidFill>
-              <a:srgbClr val="DCE1E8"/>
-            </a:solidFill>
-          </a:ln>
-          <a:effectLst/>
-        </p:spPr>
-        <p:txBody>
-          <a:bodyPr rtlCol="0" anchor="ctr" wrap="square"/>
-          <a:lstStyle/>
-          <a:p>
-            <a:pPr algn="ctr"/>
-          </a:p>
-        </p:txBody>
-      </p:sp>
-      <p:sp>
-        <p:nvSpPr>
-          <p:cNvPr id="18" name="Rectangle 17"/>
-          <p:cNvSpPr/>
-          <p:nvPr/>
-        </p:nvSpPr>
-        <p:spPr>
-          <a:xfrm>
-            <a:off x="12065000" y="3924300"/>
-            <a:ext cx="5080000" cy="914400"/>
-          </a:xfrm>
-          <a:prstGeom prst="rect">
-            <a:avLst/>
-          </a:prstGeom>
-          <a:solidFill>
-            <a:srgbClr val="0D2B5E"/>
+              <a:t>mc ls local/nobucket</a:t>
+            </a:r>
+          </a:p>
+        </p:txBody>
+      </p:sp>
+      <p:sp>
+        <p:nvSpPr>
+          <p:cNvPr id="22" name="Oval 21"/>
+          <p:cNvSpPr/>
+          <p:nvPr/>
+        </p:nvSpPr>
+        <p:spPr>
+          <a:xfrm>
+            <a:off x="10077450" y="5527358"/>
+            <a:ext cx="97155" cy="97155"/>
+          </a:xfrm>
+          <a:prstGeom prst="ellipse">
+            <a:avLst/>
+          </a:prstGeom>
+          <a:solidFill>
+            <a:srgbClr val="1E5BC6"/>
           </a:solidFill>
           <a:ln>
             <a:noFill/>
@@ -9664,14 +9777,156 @@
       </p:sp>
       <p:sp>
         <p:nvSpPr>
-          <p:cNvPr id="19" name="TextBox 18"/>
-          <p:cNvSpPr txBox="1"/>
-          <p:nvPr/>
-        </p:nvSpPr>
-        <p:spPr>
-          <a:xfrm>
-            <a:off x="12065000" y="4171950"/>
-            <a:ext cx="5080000" cy="419100"/>
+          <p:cNvPr id="23" name="TextBox 22"/>
+          <p:cNvSpPr txBox="1"/>
+          <p:nvPr/>
+        </p:nvSpPr>
+        <p:spPr>
+          <a:xfrm>
+            <a:off x="10263188" y="5349240"/>
+            <a:ext cx="6634162" cy="453390"/>
+          </a:xfrm>
+          <a:prstGeom prst="rect">
+            <a:avLst/>
+          </a:prstGeom>
+          <a:noFill/>
+        </p:spPr>
+        <p:txBody>
+          <a:bodyPr wrap="square" lIns="0" rIns="0" tIns="0" bIns="0" anchor="ctr">
+            <a:spAutoFit/>
+          </a:bodyPr>
+          <a:lstStyle/>
+          <a:p>
+            <a:pPr algn="l">
+              <a:lnSpc>
+                <a:spcPct val="120000"/>
+              </a:lnSpc>
+            </a:pPr>
+            <a:r>
+              <a:rPr sz="1575" b="0">
+                <a:solidFill>
+                  <a:srgbClr val="3D3D3D"/>
+                </a:solidFill>
+                <a:latin typeface="Pretendard"/>
+                <a:ea typeface="Pretendard"/>
+                <a:cs typeface="Pretendard"/>
+              </a:rPr>
+              <a:t>Bucket `nobucket` does not exist</a:t>
+            </a:r>
+          </a:p>
+        </p:txBody>
+      </p:sp>
+      <p:sp>
+        <p:nvSpPr>
+          <p:cNvPr id="24" name="Oval 23"/>
+          <p:cNvSpPr/>
+          <p:nvPr/>
+        </p:nvSpPr>
+        <p:spPr>
+          <a:xfrm>
+            <a:off x="10077450" y="6037898"/>
+            <a:ext cx="97155" cy="97155"/>
+          </a:xfrm>
+          <a:prstGeom prst="ellipse">
+            <a:avLst/>
+          </a:prstGeom>
+          <a:solidFill>
+            <a:srgbClr val="1E5BC6"/>
+          </a:solidFill>
+          <a:ln>
+            <a:noFill/>
+          </a:ln>
+          <a:effectLst/>
+        </p:spPr>
+        <p:txBody>
+          <a:bodyPr rtlCol="0" anchor="ctr" wrap="square"/>
+          <a:lstStyle/>
+          <a:p>
+            <a:pPr algn="ctr"/>
+          </a:p>
+        </p:txBody>
+      </p:sp>
+      <p:sp>
+        <p:nvSpPr>
+          <p:cNvPr id="25" name="TextBox 24"/>
+          <p:cNvSpPr txBox="1"/>
+          <p:nvPr/>
+        </p:nvSpPr>
+        <p:spPr>
+          <a:xfrm>
+            <a:off x="10263188" y="5859780"/>
+            <a:ext cx="6634162" cy="453390"/>
+          </a:xfrm>
+          <a:prstGeom prst="rect">
+            <a:avLst/>
+          </a:prstGeom>
+          <a:noFill/>
+        </p:spPr>
+        <p:txBody>
+          <a:bodyPr wrap="square" lIns="0" rIns="0" tIns="0" bIns="0" anchor="ctr">
+            <a:spAutoFit/>
+          </a:bodyPr>
+          <a:lstStyle/>
+          <a:p>
+            <a:pPr algn="l">
+              <a:lnSpc>
+                <a:spcPct val="120000"/>
+              </a:lnSpc>
+            </a:pPr>
+            <a:r>
+              <a:rPr sz="1575" b="0">
+                <a:solidFill>
+                  <a:srgbClr val="3D3D3D"/>
+                </a:solidFill>
+                <a:latin typeface="Pretendard"/>
+                <a:ea typeface="Pretendard"/>
+                <a:cs typeface="Pretendard"/>
+              </a:rPr>
+              <a:t>종료 코드 1</a:t>
+            </a:r>
+          </a:p>
+        </p:txBody>
+      </p:sp>
+      <p:sp>
+        <p:nvSpPr>
+          <p:cNvPr id="26" name="Oval 25"/>
+          <p:cNvSpPr/>
+          <p:nvPr/>
+        </p:nvSpPr>
+        <p:spPr>
+          <a:xfrm>
+            <a:off x="8686800" y="3771900"/>
+            <a:ext cx="914400" cy="914400"/>
+          </a:xfrm>
+          <a:prstGeom prst="ellipse">
+            <a:avLst/>
+          </a:prstGeom>
+          <a:solidFill>
+            <a:srgbClr val="0D2B5E"/>
+          </a:solidFill>
+          <a:ln>
+            <a:noFill/>
+          </a:ln>
+          <a:effectLst/>
+        </p:spPr>
+        <p:txBody>
+          <a:bodyPr rtlCol="0" anchor="ctr" wrap="square"/>
+          <a:lstStyle/>
+          <a:p>
+            <a:pPr algn="ctr"/>
+          </a:p>
+        </p:txBody>
+      </p:sp>
+      <p:sp>
+        <p:nvSpPr>
+          <p:cNvPr id="27" name="TextBox 26"/>
+          <p:cNvSpPr txBox="1"/>
+          <p:nvPr/>
+        </p:nvSpPr>
+        <p:spPr>
+          <a:xfrm>
+            <a:off x="8686800" y="4057650"/>
+            <a:ext cx="914400" cy="381000"/>
           </a:xfrm>
           <a:prstGeom prst="rect">
             <a:avLst/>
@@ -9690,7 +9945,7 @@
               </a:lnSpc>
             </a:pPr>
             <a:r>
-              <a:rPr sz="2475" b="1">
+              <a:rPr sz="2250" b="1">
                 <a:solidFill>
                   <a:srgbClr val="FFFFFF"/>
                 </a:solidFill>
@@ -9698,73 +9953,14 @@
                 <a:ea typeface="Pretendard"/>
                 <a:cs typeface="Pretendard"/>
               </a:rPr>
-              <a:t>③ 이유</a:t>
-            </a:r>
-          </a:p>
-        </p:txBody>
-      </p:sp>
-      <p:sp>
-        <p:nvSpPr>
-          <p:cNvPr id="20" name="TextBox 19"/>
-          <p:cNvSpPr txBox="1"/>
-          <p:nvPr/>
-        </p:nvSpPr>
-        <p:spPr>
-          <a:xfrm>
-            <a:off x="12274550" y="5143500"/>
-            <a:ext cx="4660900" cy="1524000"/>
-          </a:xfrm>
-          <a:prstGeom prst="rect">
-            <a:avLst/>
-          </a:prstGeom>
-          <a:noFill/>
-        </p:spPr>
-        <p:txBody>
-          <a:bodyPr wrap="square" lIns="0" rIns="0" tIns="0" bIns="0" anchor="t">
-            <a:spAutoFit/>
-          </a:bodyPr>
-          <a:lstStyle/>
-          <a:p>
-            <a:pPr algn="ctr">
-              <a:lnSpc>
-                <a:spcPct val="146000"/>
-              </a:lnSpc>
-            </a:pPr>
-            <a:r>
-              <a:rPr sz="2100" b="0">
-                <a:solidFill>
-                  <a:srgbClr val="3D3D3D"/>
-                </a:solidFill>
-                <a:latin typeface="Pretendard"/>
-                <a:ea typeface="Pretendard"/>
-                <a:cs typeface="Pretendard"/>
-              </a:rPr>
-              <a:t>폴더가 아니라</a:t>
-            </a:r>
-          </a:p>
-          <a:p>
-            <a:pPr algn="ctr">
-              <a:lnSpc>
-                <a:spcPct val="146000"/>
-              </a:lnSpc>
-            </a:pPr>
-            <a:r>
-              <a:rPr sz="2100" b="0">
-                <a:solidFill>
-                  <a:srgbClr val="3D3D3D"/>
-                </a:solidFill>
-                <a:latin typeface="Pretendard"/>
-                <a:ea typeface="Pretendard"/>
-                <a:cs typeface="Pretendard"/>
-              </a:rPr>
-              <a:t>이름표의 일부</a:t>
-            </a:r>
-          </a:p>
-        </p:txBody>
-      </p:sp>
-      <p:sp>
-        <p:nvSpPr>
-          <p:cNvPr id="21" name="Rectangle 20"/>
+              <a:t>VS</a:t>
+            </a:r>
+          </a:p>
+        </p:txBody>
+      </p:sp>
+      <p:sp>
+        <p:nvSpPr>
+          <p:cNvPr id="28" name="Rectangle 27"/>
           <p:cNvSpPr/>
           <p:nvPr/>
         </p:nvSpPr>
@@ -9794,7 +9990,7 @@
       </p:sp>
       <p:sp>
         <p:nvSpPr>
-          <p:cNvPr id="22" name="TextBox 21"/>
+          <p:cNvPr id="29" name="TextBox 28"/>
           <p:cNvSpPr txBox="1"/>
           <p:nvPr/>
         </p:nvSpPr>
@@ -9835,7 +10031,7 @@
       </p:sp>
       <p:sp>
         <p:nvSpPr>
-          <p:cNvPr id="23" name="TextBox 22"/>
+          <p:cNvPr id="30" name="TextBox 29"/>
           <p:cNvSpPr txBox="1"/>
           <p:nvPr/>
         </p:nvSpPr>
@@ -9894,7 +10090,7 @@
       <p:grpSpPr/>
       <p:sp>
         <p:nvSpPr>
-          <p:cNvPr id="2" name="Oval 1"/>
+          <p:cNvPr id="2" name="deckgen:decor"/>
           <p:cNvSpPr/>
           <p:nvPr/>
         </p:nvSpPr>
@@ -9924,7 +10120,7 @@
       </p:sp>
       <p:sp>
         <p:nvSpPr>
-          <p:cNvPr id="3" name="Oval 2"/>
+          <p:cNvPr id="3" name="deckgen:decor"/>
           <p:cNvSpPr/>
           <p:nvPr/>
         </p:nvSpPr>
@@ -9954,7 +10150,7 @@
       </p:sp>
       <p:sp>
         <p:nvSpPr>
-          <p:cNvPr id="4" name="Oval 3"/>
+          <p:cNvPr id="4" name="deckgen:decor"/>
           <p:cNvSpPr/>
           <p:nvPr/>
         </p:nvSpPr>
@@ -10463,7 +10659,7 @@
                 <a:ea typeface="Pretendard"/>
                 <a:cs typeface="Pretendard"/>
               </a:rPr>
-              <a:t>호스트에서 실행하니 endpoint_url=http://localhost:9000 · 키는 minioadmin</a:t>
+              <a:t>호스트에서 실행하니 endpoint_url=http://localhost:9000</a:t>
             </a:r>
           </a:p>
         </p:txBody>
@@ -10650,7 +10846,7 @@
                 <a:ea typeface="Pretendard"/>
                 <a:cs typeface="Pretendard"/>
               </a:rPr>
-              <a:t>list_buckets · list_objects_v2(Prefix) · put_object · get_object</a:t>
+              <a:t>list_buckets · list_objects_v2(Prefix='demo/') · put · get</a:t>
             </a:r>
           </a:p>
         </p:txBody>
@@ -10663,12 +10859,199 @@
         </p:nvSpPr>
         <p:spPr>
           <a:xfrm>
-            <a:off x="13144500" y="2933700"/>
-            <a:ext cx="4000500" cy="3629025"/>
+            <a:off x="1143000" y="6734175"/>
+            <a:ext cx="11430000" cy="1095375"/>
           </a:xfrm>
           <a:prstGeom prst="roundRect">
             <a:avLst>
-              <a:gd name="adj" fmla="val 1312"/>
+              <a:gd name="adj" fmla="val 4347"/>
+            </a:avLst>
+          </a:prstGeom>
+          <a:solidFill>
+            <a:srgbClr val="FAFBFD"/>
+          </a:solidFill>
+          <a:ln w="9525">
+            <a:solidFill>
+              <a:srgbClr val="DCE1E8"/>
+            </a:solidFill>
+          </a:ln>
+          <a:effectLst/>
+        </p:spPr>
+        <p:txBody>
+          <a:bodyPr rtlCol="0" anchor="ctr" wrap="square"/>
+          <a:lstStyle/>
+          <a:p>
+            <a:pPr algn="ctr"/>
+          </a:p>
+        </p:txBody>
+      </p:sp>
+      <p:sp>
+        <p:nvSpPr>
+          <p:cNvPr id="24" name="Oval 23"/>
+          <p:cNvSpPr/>
+          <p:nvPr/>
+        </p:nvSpPr>
+        <p:spPr>
+          <a:xfrm>
+            <a:off x="1447800" y="6981825"/>
+            <a:ext cx="590550" cy="590550"/>
+          </a:xfrm>
+          <a:prstGeom prst="ellipse">
+            <a:avLst/>
+          </a:prstGeom>
+          <a:solidFill>
+            <a:srgbClr val="0D2B5E"/>
+          </a:solidFill>
+          <a:ln>
+            <a:noFill/>
+          </a:ln>
+          <a:effectLst/>
+        </p:spPr>
+        <p:txBody>
+          <a:bodyPr rtlCol="0" anchor="ctr" wrap="square"/>
+          <a:lstStyle/>
+          <a:p>
+            <a:pPr algn="ctr"/>
+          </a:p>
+        </p:txBody>
+      </p:sp>
+      <p:sp>
+        <p:nvSpPr>
+          <p:cNvPr id="25" name="TextBox 24"/>
+          <p:cNvSpPr txBox="1"/>
+          <p:nvPr/>
+        </p:nvSpPr>
+        <p:spPr>
+          <a:xfrm>
+            <a:off x="1447800" y="7134225"/>
+            <a:ext cx="590550" cy="323850"/>
+          </a:xfrm>
+          <a:prstGeom prst="rect">
+            <a:avLst/>
+          </a:prstGeom>
+          <a:noFill/>
+        </p:spPr>
+        <p:txBody>
+          <a:bodyPr wrap="square" lIns="0" rIns="0" tIns="0" bIns="0" anchor="t">
+            <a:spAutoFit/>
+          </a:bodyPr>
+          <a:lstStyle/>
+          <a:p>
+            <a:pPr algn="ctr">
+              <a:lnSpc>
+                <a:spcPct val="100000"/>
+              </a:lnSpc>
+            </a:pPr>
+            <a:r>
+              <a:rPr sz="2250" b="1">
+                <a:solidFill>
+                  <a:srgbClr val="FFFFFF"/>
+                </a:solidFill>
+                <a:latin typeface="Pretendard"/>
+                <a:ea typeface="Pretendard"/>
+                <a:cs typeface="Pretendard"/>
+              </a:rPr>
+              <a:t>4</a:t>
+            </a:r>
+          </a:p>
+        </p:txBody>
+      </p:sp>
+      <p:sp>
+        <p:nvSpPr>
+          <p:cNvPr id="26" name="TextBox 25"/>
+          <p:cNvSpPr txBox="1"/>
+          <p:nvPr/>
+        </p:nvSpPr>
+        <p:spPr>
+          <a:xfrm>
+            <a:off x="2324100" y="6943725"/>
+            <a:ext cx="9906000" cy="400050"/>
+          </a:xfrm>
+          <a:prstGeom prst="rect">
+            <a:avLst/>
+          </a:prstGeom>
+          <a:noFill/>
+        </p:spPr>
+        <p:txBody>
+          <a:bodyPr wrap="square" lIns="0" rIns="0" tIns="0" bIns="0" anchor="t">
+            <a:spAutoFit/>
+          </a:bodyPr>
+          <a:lstStyle/>
+          <a:p>
+            <a:pPr algn="l">
+              <a:lnSpc>
+                <a:spcPct val="110000"/>
+              </a:lnSpc>
+            </a:pPr>
+            <a:r>
+              <a:rPr sz="2475" b="1">
+                <a:solidFill>
+                  <a:srgbClr val="0D2B5E"/>
+                </a:solidFill>
+                <a:latin typeface="Pretendard"/>
+                <a:ea typeface="Pretendard"/>
+                <a:cs typeface="Pretendard"/>
+              </a:rPr>
+              <a:t>python3 s3_demo.py</a:t>
+            </a:r>
+          </a:p>
+        </p:txBody>
+      </p:sp>
+      <p:sp>
+        <p:nvSpPr>
+          <p:cNvPr id="27" name="TextBox 26"/>
+          <p:cNvSpPr txBox="1"/>
+          <p:nvPr/>
+        </p:nvSpPr>
+        <p:spPr>
+          <a:xfrm>
+            <a:off x="2324100" y="7343775"/>
+            <a:ext cx="9906000" cy="361950"/>
+          </a:xfrm>
+          <a:prstGeom prst="rect">
+            <a:avLst/>
+          </a:prstGeom>
+          <a:noFill/>
+        </p:spPr>
+        <p:txBody>
+          <a:bodyPr wrap="square" lIns="0" rIns="0" tIns="0" bIns="0" anchor="t">
+            <a:spAutoFit/>
+          </a:bodyPr>
+          <a:lstStyle/>
+          <a:p>
+            <a:pPr algn="l">
+              <a:lnSpc>
+                <a:spcPct val="120000"/>
+              </a:lnSpc>
+            </a:pPr>
+            <a:r>
+              <a:rPr sz="2025" b="0">
+                <a:solidFill>
+                  <a:srgbClr val="3D3D3D"/>
+                </a:solidFill>
+                <a:latin typeface="Pretendard"/>
+                <a:ea typeface="Pretendard"/>
+                <a:cs typeface="Pretendard"/>
+              </a:rPr>
+              <a:t>['raw', 'warehouse'] · demo/ 2개(16 bytes) · written by boto3</a:t>
+            </a:r>
+          </a:p>
+        </p:txBody>
+      </p:sp>
+      <p:sp>
+        <p:nvSpPr>
+          <p:cNvPr id="28" name="Rounded Rectangle 27"/>
+          <p:cNvSpPr/>
+          <p:nvPr/>
+        </p:nvSpPr>
+        <p:spPr>
+          <a:xfrm>
+            <a:off x="13144500" y="2933700"/>
+            <a:ext cx="4000500" cy="4895850"/>
+          </a:xfrm>
+          <a:prstGeom prst="roundRect">
+            <a:avLst>
+              <a:gd name="adj" fmla="val 1190"/>
             </a:avLst>
           </a:prstGeom>
           <a:solidFill>
@@ -10691,13 +11074,13 @@
       </p:sp>
       <p:sp>
         <p:nvSpPr>
-          <p:cNvPr id="24" name="TextBox 23"/>
-          <p:cNvSpPr txBox="1"/>
-          <p:nvPr/>
-        </p:nvSpPr>
-        <p:spPr>
-          <a:xfrm>
-            <a:off x="13487400" y="3929062"/>
+          <p:cNvPr id="29" name="TextBox 28"/>
+          <p:cNvSpPr txBox="1"/>
+          <p:nvPr/>
+        </p:nvSpPr>
+        <p:spPr>
+          <a:xfrm>
+            <a:off x="13487400" y="4562475"/>
             <a:ext cx="3314700" cy="304800"/>
           </a:xfrm>
           <a:prstGeom prst="rect">
@@ -10732,13 +11115,13 @@
       </p:sp>
       <p:sp>
         <p:nvSpPr>
-          <p:cNvPr id="25" name="TextBox 24"/>
-          <p:cNvSpPr txBox="1"/>
-          <p:nvPr/>
-        </p:nvSpPr>
-        <p:spPr>
-          <a:xfrm>
-            <a:off x="13487400" y="4329112"/>
+          <p:cNvPr id="30" name="TextBox 29"/>
+          <p:cNvSpPr txBox="1"/>
+          <p:nvPr/>
+        </p:nvSpPr>
+        <p:spPr>
+          <a:xfrm>
+            <a:off x="13487400" y="4962525"/>
             <a:ext cx="3314700" cy="1238250"/>
           </a:xfrm>
           <a:prstGeom prst="rect">
@@ -10791,7 +11174,7 @@
       </p:sp>
       <p:sp>
         <p:nvSpPr>
-          <p:cNvPr id="26" name="Rectangle 25"/>
+          <p:cNvPr id="31" name="Rectangle 30"/>
           <p:cNvSpPr/>
           <p:nvPr/>
         </p:nvSpPr>
@@ -10821,7 +11204,7 @@
       </p:sp>
       <p:sp>
         <p:nvSpPr>
-          <p:cNvPr id="27" name="TextBox 26"/>
+          <p:cNvPr id="32" name="TextBox 31"/>
           <p:cNvSpPr txBox="1"/>
           <p:nvPr/>
         </p:nvSpPr>
@@ -10862,7 +11245,7 @@
       </p:sp>
       <p:sp>
         <p:nvSpPr>
-          <p:cNvPr id="28" name="TextBox 27"/>
+          <p:cNvPr id="33" name="TextBox 32"/>
           <p:cNvSpPr txBox="1"/>
           <p:nvPr/>
         </p:nvSpPr>
@@ -10921,7 +11304,7 @@
       <p:grpSpPr/>
       <p:sp>
         <p:nvSpPr>
-          <p:cNvPr id="2" name="Oval 1"/>
+          <p:cNvPr id="2" name="deckgen:decor"/>
           <p:cNvSpPr/>
           <p:nvPr/>
         </p:nvSpPr>
@@ -10951,7 +11334,7 @@
       </p:sp>
       <p:sp>
         <p:nvSpPr>
-          <p:cNvPr id="3" name="Oval 2"/>
+          <p:cNvPr id="3" name="deckgen:decor"/>
           <p:cNvSpPr/>
           <p:nvPr/>
         </p:nvSpPr>
@@ -10981,7 +11364,7 @@
       </p:sp>
       <p:sp>
         <p:nvSpPr>
-          <p:cNvPr id="4" name="Oval 3"/>
+          <p:cNvPr id="4" name="deckgen:decor"/>
           <p:cNvSpPr/>
           <p:nvPr/>
         </p:nvSpPr>
@@ -11572,7 +11955,7 @@
                 <a:ea typeface="Pretendard"/>
                 <a:cs typeface="Pretendard"/>
               </a:rPr>
-              <a:t>mc cat 에</a:t>
+              <a:t>98B 하나 · mc cat</a:t>
             </a:r>
           </a:p>
           <a:p>
@@ -11740,7 +12123,7 @@
                 <a:ea typeface="Pretendard"/>
                 <a:cs typeface="Pretendard"/>
               </a:rPr>
-              <a:t>mc mirror /data local/raw</a:t>
+              <a:t>mc mirror /data</a:t>
             </a:r>
           </a:p>
           <a:p>
@@ -11758,7 +12141,7 @@
                 <a:ea typeface="Pretendard"/>
                 <a:cs typeface="Pretendard"/>
               </a:rPr>
-              <a:t>rsync 같은 동작</a:t>
+              <a:t>local/raw/mirror-test</a:t>
             </a:r>
           </a:p>
         </p:txBody>
@@ -12337,7 +12720,7 @@
                 <a:ea typeface="Pretendard"/>
                 <a:cs typeface="Pretendard"/>
               </a:rPr>
-              <a:t>N개 · bytes</a:t>
+              <a:t>과제 전이면</a:t>
             </a:r>
           </a:p>
           <a:p>
@@ -12355,7 +12738,7 @@
                 <a:ea typeface="Pretendard"/>
                 <a:cs typeface="Pretendard"/>
               </a:rPr>
-              <a:t>출력</a:t>
+              <a:t>5개 · 167 bytes</a:t>
             </a:r>
           </a:p>
         </p:txBody>
@@ -12533,7 +12916,7 @@
       <p:grpSpPr/>
       <p:sp>
         <p:nvSpPr>
-          <p:cNvPr id="2" name="Oval 1"/>
+          <p:cNvPr id="2" name="deckgen:decor"/>
           <p:cNvSpPr/>
           <p:nvPr/>
         </p:nvSpPr>
@@ -12563,7 +12946,7 @@
       </p:sp>
       <p:sp>
         <p:nvSpPr>
-          <p:cNvPr id="3" name="Oval 2"/>
+          <p:cNvPr id="3" name="deckgen:decor"/>
           <p:cNvSpPr/>
           <p:nvPr/>
         </p:nvSpPr>
@@ -12593,7 +12976,7 @@
       </p:sp>
       <p:sp>
         <p:nvSpPr>
-          <p:cNvPr id="4" name="Oval 3"/>
+          <p:cNvPr id="4" name="deckgen:decor"/>
           <p:cNvSpPr/>
           <p:nvPr/>
         </p:nvSpPr>
@@ -12874,7 +13257,7 @@
                 <a:ea typeface="Pretendard"/>
                 <a:cs typeface="Pretendard"/>
               </a:rPr>
-              <a:t>mc ls local 에 raw/ 와 warehouse/ 두 버킷</a:t>
+              <a:t>alias list 에 Src env, mc ls local 에 raw/ · warehouse/</a:t>
             </a:r>
           </a:p>
         </p:txBody>
@@ -13020,7 +13403,7 @@
                 <a:ea typeface="Pretendard"/>
                 <a:cs typeface="Pretendard"/>
               </a:rPr>
-              <a:t>mc cat local/raw/hello.txt 가 「hello object storage」</a:t>
+              <a:t>--recursive 목록에 demo/dt=2026-08-01/part-0.csv 가 한 줄로</a:t>
             </a:r>
           </a:p>
         </p:txBody>
@@ -13166,7 +13549,7 @@
                 <a:ea typeface="Pretendard"/>
                 <a:cs typeface="Pretendard"/>
               </a:rPr>
-              <a:t>--recursive 목록에 orders/dt=2026-08-01/part-0.csv 가 한 줄로</a:t>
+              <a:t>빈 접두사는 출력 없이 종료 코드 0, 없는 버킷은 오류·1</a:t>
             </a:r>
           </a:p>
         </p:txBody>
@@ -13312,7 +13695,7 @@
                 <a:ea typeface="Pretendard"/>
                 <a:cs typeface="Pretendard"/>
               </a:rPr>
-              <a:t>python3 s3_demo.py 끝에 「written by boto3」</a:t>
+              <a:t>python3 s3_demo.py 끝에 「읽은 내용: written by boto3」</a:t>
             </a:r>
           </a:p>
         </p:txBody>
@@ -13458,7 +13841,7 @@
                 <a:ea typeface="Pretendard"/>
                 <a:cs typeface="Pretendard"/>
               </a:rPr>
-              <a:t>raw/orders/ 아래 orders_2026-08-01.csv — 4-3 의 첫 배치 파일</a:t>
+              <a:t>raw/orders/ 에는 orders_2026-08-01.csv 하나만 — 4-3 첫 배치</a:t>
             </a:r>
           </a:p>
         </p:txBody>
